--- a/dokumentumok/EseményTér.pptx
+++ b/dokumentumok/EseményTér.pptx
@@ -3909,8 +3909,8 @@
         </p:nvSpPr>
         <p:spPr>
           <a:xfrm>
-            <a:off x="3091992" y="2318994"/>
-            <a:ext cx="6777872" cy="1754326"/>
+            <a:off x="518204" y="2264130"/>
+            <a:ext cx="6777872" cy="1477328"/>
           </a:xfrm>
           <a:prstGeom prst="rect">
             <a:avLst/>
@@ -3925,19 +3925,16 @@
           <a:p>
             <a:r>
               <a:rPr lang="hu-HU" dirty="0"/>
-              <a:t>Frontend E2E tesztek a kritikus felhasználói utakra</a:t>
-            </a:r>
-          </a:p>
-          <a:p>
+              <a:t>Frontend </a:t>
+            </a:r>
+            <a:r>
+              <a:rPr lang="hu-HU" dirty="0" err="1"/>
+              <a:t>TypeScript</a:t>
+            </a:r>
             <a:r>
               <a:rPr lang="hu-HU" dirty="0"/>
-              <a:t>Tesztelt folyamatok: regisztráció, login, logout, </a:t>
-            </a:r>
-            <a:r>
-              <a:rPr lang="hu-HU" dirty="0" err="1"/>
-              <a:t>setup</a:t>
-            </a:r>
-            <a:endParaRPr lang="hu-HU" dirty="0"/>
+              <a:t> tesztek pozitív és negatív tesztek</a:t>
+            </a:r>
           </a:p>
           <a:p>
             <a:r>
@@ -5969,8 +5966,8 @@
         </p:nvSpPr>
         <p:spPr>
           <a:xfrm>
-            <a:off x="1555423" y="2888241"/>
-            <a:ext cx="7767686" cy="1477328"/>
+            <a:off x="275263" y="2175009"/>
+            <a:ext cx="3940121" cy="1477328"/>
           </a:xfrm>
           <a:prstGeom prst="rect">
             <a:avLst/>
@@ -6000,65 +5997,209 @@
           </a:bodyPr>
           <a:lstStyle/>
           <a:p>
+            <a:pPr marL="285750" indent="-285750">
+              <a:buFont typeface="Arial" panose="020B0604020202020204" pitchFamily="34" charset="0"/>
+              <a:buChar char="•"/>
+            </a:pPr>
             <a:r>
               <a:rPr lang="hu-HU" dirty="0"/>
-              <a:t>Rétegelt felépítés: </a:t>
-            </a:r>
-            <a:r>
-              <a:rPr lang="hu-HU" dirty="0" err="1"/>
-              <a:t>route</a:t>
-            </a:r>
+              <a:t>Rétegelt backend felépítés</a:t>
+            </a:r>
+          </a:p>
+          <a:p>
+            <a:pPr marL="285750" indent="-285750">
+              <a:buFont typeface="Arial" panose="020B0604020202020204" pitchFamily="34" charset="0"/>
+              <a:buChar char="•"/>
+            </a:pPr>
             <a:r>
               <a:rPr lang="hu-HU" dirty="0"/>
-              <a:t> → </a:t>
-            </a:r>
-            <a:r>
-              <a:rPr lang="hu-HU" dirty="0" err="1"/>
-              <a:t>controller</a:t>
-            </a:r>
+              <a:t>API modulonként szervezve</a:t>
+            </a:r>
+          </a:p>
+          <a:p>
+            <a:pPr marL="285750" indent="-285750">
+              <a:buFont typeface="Arial" panose="020B0604020202020204" pitchFamily="34" charset="0"/>
+              <a:buChar char="•"/>
+            </a:pPr>
             <a:r>
               <a:rPr lang="hu-HU" dirty="0"/>
-              <a:t> → </a:t>
-            </a:r>
-            <a:r>
-              <a:rPr lang="hu-HU" dirty="0" err="1"/>
-              <a:t>model</a:t>
-            </a:r>
+              <a:t>Egységes hibakezelés</a:t>
+            </a:r>
+          </a:p>
+          <a:p>
+            <a:pPr marL="285750" indent="-285750">
+              <a:buFont typeface="Arial" panose="020B0604020202020204" pitchFamily="34" charset="0"/>
+              <a:buChar char="•"/>
+            </a:pPr>
             <a:r>
               <a:rPr lang="hu-HU" dirty="0"/>
-              <a:t> → adatbázis</a:t>
-            </a:r>
-          </a:p>
-          <a:p>
+              <a:t>Központi validáció és üzleti logika</a:t>
+            </a:r>
+          </a:p>
+          <a:p>
+            <a:pPr marL="285750" indent="-285750">
+              <a:buFont typeface="Arial" panose="020B0604020202020204" pitchFamily="34" charset="0"/>
+              <a:buChar char="•"/>
+            </a:pPr>
             <a:r>
               <a:rPr lang="hu-HU" dirty="0"/>
-              <a:t>Fő API területek: </a:t>
-            </a:r>
-            <a:r>
-              <a:rPr lang="hu-HU" dirty="0" err="1"/>
-              <a:t>auth</a:t>
+              <a:t>Stabil, bővíthető működés</a:t>
+            </a:r>
+          </a:p>
+        </p:txBody>
+      </p:sp>
+      <p:sp>
+        <p:nvSpPr>
+          <p:cNvPr id="3" name="Szövegdoboz 2">
+            <a:extLst>
+              <a:ext uri="{FF2B5EF4-FFF2-40B4-BE49-F238E27FC236}">
+                <a16:creationId xmlns:a16="http://schemas.microsoft.com/office/drawing/2014/main" id="{C42936C3-C506-CA4A-8B86-D8D87EF17382}"/>
+              </a:ext>
+            </a:extLst>
+          </p:cNvPr>
+          <p:cNvSpPr txBox="1"/>
+          <p:nvPr/>
+        </p:nvSpPr>
+        <p:spPr>
+          <a:xfrm>
+            <a:off x="6254496" y="1887334"/>
+            <a:ext cx="3822192" cy="646331"/>
+          </a:xfrm>
+          <a:prstGeom prst="rect">
+            <a:avLst/>
+          </a:prstGeom>
+          <a:noFill/>
+        </p:spPr>
+        <p:txBody>
+          <a:bodyPr wrap="square" rtlCol="0">
+            <a:spAutoFit/>
+          </a:bodyPr>
+          <a:lstStyle/>
+          <a:p>
+            <a:r>
+              <a:rPr lang="hu-HU" b="1" dirty="0"/>
+              <a:t>Fő API modulok:</a:t>
             </a:r>
             <a:r>
               <a:rPr lang="hu-HU" dirty="0"/>
-              <a:t>, események, intézmények, osztályok, kérelmek</a:t>
-            </a:r>
-          </a:p>
-          <a:p>
+              <a:t> Auth, Események, Intézmények, Osztályok, Kérelmek</a:t>
+            </a:r>
+          </a:p>
+        </p:txBody>
+      </p:sp>
+      <p:sp>
+        <p:nvSpPr>
+          <p:cNvPr id="6" name="Szövegdoboz 5">
+            <a:extLst>
+              <a:ext uri="{FF2B5EF4-FFF2-40B4-BE49-F238E27FC236}">
+                <a16:creationId xmlns:a16="http://schemas.microsoft.com/office/drawing/2014/main" id="{C7B024CC-432F-1562-78A5-88D39CA24386}"/>
+              </a:ext>
+            </a:extLst>
+          </p:cNvPr>
+          <p:cNvSpPr txBox="1"/>
+          <p:nvPr/>
+        </p:nvSpPr>
+        <p:spPr>
+          <a:xfrm>
+            <a:off x="6254496" y="2590507"/>
+            <a:ext cx="4227463" cy="646331"/>
+          </a:xfrm>
+          <a:prstGeom prst="rect">
+            <a:avLst/>
+          </a:prstGeom>
+          <a:noFill/>
+        </p:spPr>
+        <p:txBody>
+          <a:bodyPr wrap="square" rtlCol="0">
+            <a:spAutoFit/>
+          </a:bodyPr>
+          <a:lstStyle/>
+          <a:p>
+            <a:r>
+              <a:rPr lang="hu-HU" b="1" dirty="0"/>
+              <a:t>Hibakezelés:</a:t>
+            </a:r>
             <a:r>
               <a:rPr lang="hu-HU" dirty="0"/>
-              <a:t>Válaszkódok használata: siker, validációs hiba, jogosultsági hiba</a:t>
-            </a:r>
-          </a:p>
-          <a:p>
+              <a:t> egységes válaszkódok (siker, validációs hiba, jogosultsági hiba)</a:t>
+            </a:r>
+          </a:p>
+        </p:txBody>
+      </p:sp>
+      <p:sp>
+        <p:nvSpPr>
+          <p:cNvPr id="7" name="Szövegdoboz 6">
+            <a:extLst>
+              <a:ext uri="{FF2B5EF4-FFF2-40B4-BE49-F238E27FC236}">
+                <a16:creationId xmlns:a16="http://schemas.microsoft.com/office/drawing/2014/main" id="{1189996F-FCDB-806F-01A8-BCC075788E18}"/>
+              </a:ext>
+            </a:extLst>
+          </p:cNvPr>
+          <p:cNvSpPr txBox="1"/>
+          <p:nvPr/>
+        </p:nvSpPr>
+        <p:spPr>
+          <a:xfrm>
+            <a:off x="6254496" y="3306705"/>
+            <a:ext cx="4681728" cy="646331"/>
+          </a:xfrm>
+          <a:prstGeom prst="rect">
+            <a:avLst/>
+          </a:prstGeom>
+          <a:noFill/>
+        </p:spPr>
+        <p:txBody>
+          <a:bodyPr wrap="square" rtlCol="0">
+            <a:spAutoFit/>
+          </a:bodyPr>
+          <a:lstStyle/>
+          <a:p>
+            <a:r>
+              <a:rPr lang="hu-HU" b="1" dirty="0"/>
+              <a:t>Központi logika:</a:t>
+            </a:r>
             <a:r>
               <a:rPr lang="hu-HU" dirty="0"/>
-              <a:t>Központi validáció és üzleti logika a backendben</a:t>
-            </a:r>
-          </a:p>
-          <a:p>
+              <a:t> validáció és üzleti szabályok a backendben</a:t>
+            </a:r>
+          </a:p>
+        </p:txBody>
+      </p:sp>
+      <p:sp>
+        <p:nvSpPr>
+          <p:cNvPr id="8" name="Szövegdoboz 7">
+            <a:extLst>
+              <a:ext uri="{FF2B5EF4-FFF2-40B4-BE49-F238E27FC236}">
+                <a16:creationId xmlns:a16="http://schemas.microsoft.com/office/drawing/2014/main" id="{435EC997-2B62-E2BA-4F84-2BE195030D7D}"/>
+              </a:ext>
+            </a:extLst>
+          </p:cNvPr>
+          <p:cNvSpPr txBox="1"/>
+          <p:nvPr/>
+        </p:nvSpPr>
+        <p:spPr>
+          <a:xfrm>
+            <a:off x="6254496" y="4044541"/>
+            <a:ext cx="3474720" cy="646331"/>
+          </a:xfrm>
+          <a:prstGeom prst="rect">
+            <a:avLst/>
+          </a:prstGeom>
+          <a:noFill/>
+        </p:spPr>
+        <p:txBody>
+          <a:bodyPr wrap="square" rtlCol="0">
+            <a:spAutoFit/>
+          </a:bodyPr>
+          <a:lstStyle/>
+          <a:p>
+            <a:r>
+              <a:rPr lang="hu-HU" b="1" dirty="0"/>
+              <a:t>Eredmény:</a:t>
+            </a:r>
             <a:r>
               <a:rPr lang="hu-HU" dirty="0"/>
-              <a:t>Stabil, jól karbantartható szerkezet</a:t>
+              <a:t> stabil, átlátható, könnyen karbantartható rendszer</a:t>
             </a:r>
           </a:p>
         </p:txBody>
@@ -6233,8 +6374,8 @@
         </p:nvSpPr>
         <p:spPr>
           <a:xfrm>
-            <a:off x="1291471" y="2432115"/>
-            <a:ext cx="8191893" cy="1477328"/>
+            <a:off x="441079" y="2404683"/>
+            <a:ext cx="4524113" cy="1477328"/>
           </a:xfrm>
           <a:prstGeom prst="rect">
             <a:avLst/>
@@ -6247,17 +6388,17 @@
           </a:bodyPr>
           <a:lstStyle/>
           <a:p>
+            <a:pPr marL="285750" indent="-285750">
+              <a:buFont typeface="Arial" panose="020B0604020202020204" pitchFamily="34" charset="0"/>
+              <a:buChar char="•"/>
+            </a:pPr>
+            <a:r>
+              <a:rPr lang="hu-HU" dirty="0" err="1"/>
+              <a:t>Token</a:t>
+            </a:r>
             <a:r>
               <a:rPr lang="hu-HU" dirty="0"/>
-              <a:t>Hitelesítés: </a:t>
-            </a:r>
-            <a:r>
-              <a:rPr lang="hu-HU" dirty="0" err="1"/>
-              <a:t>token</a:t>
-            </a:r>
-            <a:r>
-              <a:rPr lang="hu-HU" dirty="0"/>
-              <a:t> alapú (</a:t>
+              <a:t> alapú hitelesítés (</a:t>
             </a:r>
             <a:r>
               <a:rPr lang="hu-HU" dirty="0" err="1"/>
@@ -6269,33 +6410,88 @@
             </a:r>
           </a:p>
           <a:p>
+            <a:pPr marL="285750" indent="-285750">
+              <a:buFont typeface="Arial" panose="020B0604020202020204" pitchFamily="34" charset="0"/>
+              <a:buChar char="•"/>
+            </a:pPr>
             <a:r>
               <a:rPr lang="hu-HU" dirty="0"/>
-              <a:t>Védett végpontok: csak belépett felhasználók számára</a:t>
-            </a:r>
-          </a:p>
-          <a:p>
+              <a:t>Védett API végpontok</a:t>
+            </a:r>
+          </a:p>
+          <a:p>
+            <a:pPr marL="285750" indent="-285750">
+              <a:buFont typeface="Arial" panose="020B0604020202020204" pitchFamily="34" charset="0"/>
+              <a:buChar char="•"/>
+            </a:pPr>
             <a:r>
               <a:rPr lang="hu-HU" dirty="0"/>
-              <a:t>Szerepkörök: diák, tanár, intézményi </a:t>
+              <a:t>Szerepkör-alapú hozzáférés</a:t>
+            </a:r>
+          </a:p>
+          <a:p>
+            <a:pPr marL="285750" indent="-285750">
+              <a:buFont typeface="Arial" panose="020B0604020202020204" pitchFamily="34" charset="0"/>
+              <a:buChar char="•"/>
+            </a:pPr>
+            <a:r>
+              <a:rPr lang="hu-HU" dirty="0"/>
+              <a:t>Kritikus műveletek korlátozása</a:t>
+            </a:r>
+          </a:p>
+          <a:p>
+            <a:pPr marL="285750" indent="-285750">
+              <a:buFont typeface="Arial" panose="020B0604020202020204" pitchFamily="34" charset="0"/>
+              <a:buChar char="•"/>
+            </a:pPr>
+            <a:r>
+              <a:rPr lang="hu-HU" dirty="0"/>
+              <a:t>Email-verifikáció és hozzáférés-védelem</a:t>
+            </a:r>
+          </a:p>
+        </p:txBody>
+      </p:sp>
+      <p:sp>
+        <p:nvSpPr>
+          <p:cNvPr id="4" name="Szövegdoboz 3">
+            <a:extLst>
+              <a:ext uri="{FF2B5EF4-FFF2-40B4-BE49-F238E27FC236}">
+                <a16:creationId xmlns:a16="http://schemas.microsoft.com/office/drawing/2014/main" id="{6DDC15AD-7A57-4FE6-E544-17D75C2F496A}"/>
+              </a:ext>
+            </a:extLst>
+          </p:cNvPr>
+          <p:cNvSpPr txBox="1"/>
+          <p:nvPr/>
+        </p:nvSpPr>
+        <p:spPr>
+          <a:xfrm>
+            <a:off x="6958584" y="2404683"/>
+            <a:ext cx="3429000" cy="369332"/>
+          </a:xfrm>
+          <a:prstGeom prst="rect">
+            <a:avLst/>
+          </a:prstGeom>
+          <a:noFill/>
+        </p:spPr>
+        <p:txBody>
+          <a:bodyPr wrap="square" rtlCol="0">
+            <a:spAutoFit/>
+          </a:bodyPr>
+          <a:lstStyle/>
+          <a:p>
+            <a:r>
+              <a:rPr lang="hu-HU" b="1" dirty="0"/>
+              <a:t>Szerepkörök:</a:t>
+            </a:r>
+            <a:r>
+              <a:rPr lang="hu-HU" dirty="0"/>
+              <a:t> diák, tanár, </a:t>
             </a:r>
             <a:r>
               <a:rPr lang="hu-HU" dirty="0" err="1"/>
               <a:t>admin</a:t>
             </a:r>
             <a:endParaRPr lang="hu-HU" dirty="0"/>
-          </a:p>
-          <a:p>
-            <a:r>
-              <a:rPr lang="hu-HU" dirty="0"/>
-              <a:t>Jogosultságkezelés: csak megfelelő szerepkör végezhet kritikus műveleteket</a:t>
-            </a:r>
-          </a:p>
-          <a:p>
-            <a:r>
-              <a:rPr lang="hu-HU" dirty="0"/>
-              <a:t>Email megerősítés és hozzáférés-szabályozás</a:t>
-            </a:r>
           </a:p>
         </p:txBody>
       </p:sp>
@@ -6469,8 +6665,8 @@
         </p:nvSpPr>
         <p:spPr>
           <a:xfrm>
-            <a:off x="1555423" y="2888241"/>
-            <a:ext cx="7767686" cy="2031325"/>
+            <a:off x="302695" y="1982985"/>
+            <a:ext cx="6509585" cy="2031325"/>
           </a:xfrm>
           <a:prstGeom prst="rect">
             <a:avLst/>
@@ -6500,34 +6696,20 @@
           </a:bodyPr>
           <a:lstStyle/>
           <a:p>
+            <a:pPr marL="285750" indent="-285750">
+              <a:buFont typeface="Arial" panose="020B0604020202020204" pitchFamily="34" charset="0"/>
+              <a:buChar char="•"/>
+            </a:pPr>
             <a:r>
               <a:rPr lang="hu-HU" dirty="0"/>
               <a:t>SPA működés modern, reszponzív felülettel</a:t>
             </a:r>
           </a:p>
           <a:p>
-            <a:r>
-              <a:rPr lang="hu-HU" dirty="0"/>
-              <a:t>Fő oldalak: login, </a:t>
-            </a:r>
-            <a:r>
-              <a:rPr lang="hu-HU" dirty="0" err="1"/>
-              <a:t>register</a:t>
-            </a:r>
-            <a:r>
-              <a:rPr lang="hu-HU" dirty="0"/>
-              <a:t>, eseménylista, </a:t>
-            </a:r>
-            <a:r>
-              <a:rPr lang="hu-HU" dirty="0" err="1"/>
-              <a:t>dashboardok</a:t>
-            </a:r>
-            <a:r>
-              <a:rPr lang="hu-HU" dirty="0"/>
-              <a:t>, profil</a:t>
-            </a:r>
-          </a:p>
-          <a:p>
+            <a:pPr marL="285750" indent="-285750">
+              <a:buFont typeface="Arial" panose="020B0604020202020204" pitchFamily="34" charset="0"/>
+              <a:buChar char="•"/>
+            </a:pPr>
             <a:r>
               <a:rPr lang="hu-HU" dirty="0" err="1"/>
               <a:t>Route</a:t>
@@ -6538,22 +6720,54 @@
             </a:r>
           </a:p>
           <a:p>
+            <a:pPr marL="285750" indent="-285750">
+              <a:buFont typeface="Arial" panose="020B0604020202020204" pitchFamily="34" charset="0"/>
+              <a:buChar char="•"/>
+            </a:pPr>
+            <a:r>
+              <a:rPr lang="hu-HU" dirty="0"/>
+              <a:t>Szerepkörhöz igazított irányítópultok</a:t>
+            </a:r>
+          </a:p>
+          <a:p>
+            <a:pPr marL="285750" indent="-285750">
+              <a:buFont typeface="Arial" panose="020B0604020202020204" pitchFamily="34" charset="0"/>
+              <a:buChar char="•"/>
+            </a:pPr>
+            <a:r>
+              <a:rPr lang="hu-HU" dirty="0"/>
+              <a:t>Események listázása és esemény részletei oldal kapcsolata</a:t>
+            </a:r>
+          </a:p>
+          <a:p>
+            <a:pPr marL="285750" indent="-285750">
+              <a:buFont typeface="Arial" panose="020B0604020202020204" pitchFamily="34" charset="0"/>
+              <a:buChar char="•"/>
+            </a:pPr>
             <a:r>
               <a:rPr lang="hu-HU" dirty="0"/>
               <a:t>Felhasználói állapotkezelés local/session tárolással</a:t>
             </a:r>
           </a:p>
           <a:p>
+            <a:pPr marL="285750" indent="-285750">
+              <a:buFont typeface="Arial" panose="020B0604020202020204" pitchFamily="34" charset="0"/>
+              <a:buChar char="•"/>
+            </a:pPr>
+            <a:r>
+              <a:rPr lang="hu-HU" dirty="0"/>
+              <a:t>Reszponzív UI</a:t>
+            </a:r>
+          </a:p>
+          <a:p>
+            <a:pPr marL="285750" indent="-285750">
+              <a:buFont typeface="Arial" panose="020B0604020202020204" pitchFamily="34" charset="0"/>
+              <a:buChar char="•"/>
+            </a:pPr>
             <a:r>
               <a:rPr lang="hu-HU" dirty="0"/>
               <a:t>Cél: gyors és egyszerű felhasználói élmény</a:t>
             </a:r>
-          </a:p>
-          <a:p>
-            <a:br>
-              <a:rPr lang="hu-HU" dirty="0"/>
-            </a:br>
-            <a:endParaRPr lang="hu-HU" dirty="0"/>
           </a:p>
         </p:txBody>
       </p:sp>
@@ -6727,8 +6941,8 @@
         </p:nvSpPr>
         <p:spPr>
           <a:xfrm>
-            <a:off x="1291471" y="2432115"/>
-            <a:ext cx="8191893" cy="1477328"/>
+            <a:off x="395359" y="2249235"/>
+            <a:ext cx="6453497" cy="1477328"/>
           </a:xfrm>
           <a:prstGeom prst="rect">
             <a:avLst/>
@@ -6741,38 +6955,50 @@
           </a:bodyPr>
           <a:lstStyle/>
           <a:p>
+            <a:pPr marL="285750" indent="-285750">
+              <a:buFont typeface="Arial" panose="020B0604020202020204" pitchFamily="34" charset="0"/>
+              <a:buChar char="•"/>
+            </a:pPr>
             <a:r>
               <a:rPr lang="hu-HU" dirty="0"/>
               <a:t>Egységes, könnyen tanulható felület minden szerepkörnek</a:t>
             </a:r>
           </a:p>
           <a:p>
+            <a:pPr marL="285750" indent="-285750">
+              <a:buFont typeface="Arial" panose="020B0604020202020204" pitchFamily="34" charset="0"/>
+              <a:buChar char="•"/>
+            </a:pPr>
             <a:r>
               <a:rPr lang="hu-HU" dirty="0"/>
-              <a:t>Gyors navigáció a fő funkciók között</a:t>
-            </a:r>
-          </a:p>
-          <a:p>
+              <a:t>Gyors és logikus navigáció a fő funkciók között</a:t>
+            </a:r>
+          </a:p>
+          <a:p>
+            <a:pPr marL="285750" indent="-285750">
+              <a:buFont typeface="Arial" panose="020B0604020202020204" pitchFamily="34" charset="0"/>
+              <a:buChar char="•"/>
+            </a:pPr>
             <a:r>
               <a:rPr lang="hu-HU" dirty="0"/>
-              <a:t>Átlátható </a:t>
-            </a:r>
-            <a:r>
-              <a:rPr lang="hu-HU" dirty="0" err="1"/>
-              <a:t>dashboardok</a:t>
-            </a:r>
+              <a:t>Átlátható visszajelzések a folyamatok állapotáról</a:t>
+            </a:r>
+          </a:p>
+          <a:p>
+            <a:pPr marL="285750" indent="-285750">
+              <a:buFont typeface="Arial" panose="020B0604020202020204" pitchFamily="34" charset="0"/>
+              <a:buChar char="•"/>
+            </a:pPr>
             <a:r>
               <a:rPr lang="hu-HU" dirty="0"/>
-              <a:t> és státusz-visszajelzések</a:t>
-            </a:r>
-          </a:p>
-          <a:p>
-            <a:r>
-              <a:rPr lang="hu-HU" dirty="0"/>
-              <a:t>Reszponzív megjelenés különböző eszközökön</a:t>
-            </a:r>
-          </a:p>
-          <a:p>
+              <a:t>Reszponzív működés asztali és mobil nézetben</a:t>
+            </a:r>
+          </a:p>
+          <a:p>
+            <a:pPr marL="285750" indent="-285750">
+              <a:buFont typeface="Arial" panose="020B0604020202020204" pitchFamily="34" charset="0"/>
+              <a:buChar char="•"/>
+            </a:pPr>
             <a:r>
               <a:rPr lang="hu-HU" dirty="0"/>
               <a:t>Cél: minél kevesebb lépésből elvégezhető folyamatok</a:t>
